--- a/metro/metro-s02-just-sold.pptx
+++ b/metro/metro-s02-just-sold.pptx
@@ -3646,9 +3646,9 @@
                 <a:solidFill>
                   <a:srgbClr val="FFFFFF"/>
                 </a:solidFill>
-                <a:latin typeface="Space Grotesk"/>
-                <a:ea typeface="Space Grotesk"/>
-                <a:cs typeface="Space Grotesk"/>
+                <a:latin typeface="HK Grotesk"/>
+                <a:ea typeface="HK Grotesk"/>
+                <a:cs typeface="HK Grotesk"/>
               </a:rPr>
               <a:t>NO</a:t>
             </a:r>
@@ -3755,9 +3755,9 @@
                 <a:solidFill>
                   <a:srgbClr val="FFFFFF"/>
                 </a:solidFill>
-                <a:latin typeface="Space Grotesk"/>
-                <a:ea typeface="Space Grotesk"/>
-                <a:cs typeface="Space Grotesk"/>
+                <a:latin typeface="HK Grotesk"/>
+                <a:ea typeface="HK Grotesk"/>
+                <a:cs typeface="HK Grotesk"/>
               </a:rPr>
               <a:t>SOLD</a:t>
             </a:r>
@@ -3794,9 +3794,9 @@
                 <a:solidFill>
                   <a:srgbClr val="2D5BE3"/>
                 </a:solidFill>
-                <a:latin typeface="Space Grotesk"/>
-                <a:ea typeface="Space Grotesk"/>
-                <a:cs typeface="Space Grotesk"/>
+                <a:latin typeface="HK Grotesk"/>
+                <a:ea typeface="HK Grotesk"/>
+                <a:cs typeface="HK Grotesk"/>
               </a:rPr>
               <a:t>Over asking. Closed in 18 days.</a:t>
             </a:r>
@@ -3833,9 +3833,9 @@
                 <a:solidFill>
                   <a:srgbClr val="D9DADA"/>
                 </a:solidFill>
-                <a:latin typeface="Space Grotesk"/>
-                <a:ea typeface="Space Grotesk"/>
-                <a:cs typeface="Space Grotesk"/>
+                <a:latin typeface="HK Grotesk"/>
+                <a:ea typeface="HK Grotesk"/>
+                <a:cs typeface="HK Grotesk"/>
               </a:rPr>
               <a:t>Congratulations to the new owners of 1200 N Wells, 14C.</a:t>
             </a:r>
@@ -3903,9 +3903,9 @@
                 <a:solidFill>
                   <a:srgbClr val="FFFFFF"/>
                 </a:solidFill>
-                <a:latin typeface="Space Grotesk"/>
-                <a:ea typeface="Space Grotesk"/>
-                <a:cs typeface="Space Grotesk"/>
+                <a:latin typeface="HK Grotesk"/>
+                <a:ea typeface="HK Grotesk"/>
+                <a:cs typeface="HK Grotesk"/>
               </a:rPr>
               <a:t>Thinking of selling?</a:t>
             </a:r>
@@ -3938,9 +3938,9 @@
                 <a:solidFill>
                   <a:srgbClr val="2D5BE3"/>
                 </a:solidFill>
-                <a:latin typeface="Space Grotesk"/>
-                <a:ea typeface="Space Grotesk"/>
-                <a:cs typeface="Space Grotesk"/>
+                <a:latin typeface="HK Grotesk"/>
+                <a:ea typeface="HK Grotesk"/>
+                <a:cs typeface="HK Grotesk"/>
               </a:rPr>
               <a:t>↗</a:t>
             </a:r>

--- a/metro/metro-s02-just-sold.pptx
+++ b/metro/metro-s02-just-sold.pptx
@@ -3404,7 +3404,7 @@
         </p:nvSpPr>
         <p:spPr>
           <a:xfrm>
-            <a:off x="762000" y="15735300"/>
+            <a:off x="762000" y="15525750"/>
             <a:ext cx="8763000" cy="9525"/>
           </a:xfrm>
           <a:prstGeom prst="rect">
@@ -3492,8 +3492,8 @@
         </p:nvSpPr>
         <p:spPr>
           <a:xfrm>
-            <a:off x="762000" y="15735300"/>
-            <a:ext cx="9525" cy="647700"/>
+            <a:off x="762000" y="15525750"/>
+            <a:ext cx="9525" cy="857250"/>
           </a:xfrm>
           <a:prstGeom prst="rect">
             <a:avLst/>
@@ -3536,8 +3536,8 @@
         </p:nvSpPr>
         <p:spPr>
           <a:xfrm>
-            <a:off x="9515475" y="15735300"/>
-            <a:ext cx="9525" cy="647700"/>
+            <a:off x="9515475" y="15525750"/>
+            <a:ext cx="9525" cy="857250"/>
           </a:xfrm>
           <a:prstGeom prst="rect">
             <a:avLst/>
@@ -3580,7 +3580,7 @@
         </p:nvSpPr>
         <p:spPr>
           <a:xfrm>
-            <a:off x="1024416" y="16012004"/>
+            <a:off x="1081566" y="15907229"/>
             <a:ext cx="94293" cy="94292"/>
           </a:xfrm>
           <a:prstGeom prst="rect">
@@ -3646,9 +3646,9 @@
                 <a:solidFill>
                   <a:srgbClr val="FFFFFF"/>
                 </a:solidFill>
-                <a:latin typeface="HK Grotesk"/>
-                <a:ea typeface="HK Grotesk"/>
-                <a:cs typeface="HK Grotesk"/>
+                <a:latin typeface="Space Grotesk"/>
+                <a:ea typeface="Space Grotesk"/>
+                <a:cs typeface="Space Grotesk"/>
               </a:rPr>
               <a:t>NO</a:t>
             </a:r>
@@ -3663,8 +3663,8 @@
         </p:nvSpPr>
         <p:spPr>
           <a:xfrm>
-            <a:off x="7768382" y="938212"/>
-            <a:ext cx="3191589" cy="104775"/>
+            <a:off x="6714530" y="900112"/>
+            <a:ext cx="4877752" cy="180975"/>
           </a:xfrm>
           <a:prstGeom prst="rect">
             <a:avLst/>
@@ -3677,7 +3677,7 @@
           <a:p>
             <a:pPr algn="l"/>
             <a:r>
-              <a:rPr sz="750" i="0" b="0" spc="240">
+              <a:rPr sz="1200" i="0" b="0" spc="384">
                 <a:solidFill>
                   <a:srgbClr val="A1A2A3"/>
                 </a:solidFill>
@@ -3755,9 +3755,9 @@
                 <a:solidFill>
                   <a:srgbClr val="FFFFFF"/>
                 </a:solidFill>
-                <a:latin typeface="HK Grotesk"/>
-                <a:ea typeface="HK Grotesk"/>
-                <a:cs typeface="HK Grotesk"/>
+                <a:latin typeface="Space Grotesk"/>
+                <a:ea typeface="Space Grotesk"/>
+                <a:cs typeface="Space Grotesk"/>
               </a:rPr>
               <a:t>SOLD</a:t>
             </a:r>
@@ -3794,9 +3794,9 @@
                 <a:solidFill>
                   <a:srgbClr val="2D5BE3"/>
                 </a:solidFill>
-                <a:latin typeface="HK Grotesk"/>
-                <a:ea typeface="HK Grotesk"/>
-                <a:cs typeface="HK Grotesk"/>
+                <a:latin typeface="Space Grotesk"/>
+                <a:ea typeface="Space Grotesk"/>
+                <a:cs typeface="Space Grotesk"/>
               </a:rPr>
               <a:t>Over asking. Closed in 18 days.</a:t>
             </a:r>
@@ -3811,8 +3811,8 @@
         </p:nvSpPr>
         <p:spPr>
           <a:xfrm>
-            <a:off x="76200" y="9023152"/>
-            <a:ext cx="10134600" cy="258961"/>
+            <a:off x="-838200" y="9080302"/>
+            <a:ext cx="11963400" cy="396180"/>
           </a:xfrm>
           <a:prstGeom prst="rect">
             <a:avLst/>
@@ -3829,13 +3829,13 @@
               </a:lnSpc>
             </a:pPr>
             <a:r>
-              <a:rPr sz="1275" i="0" b="0">
+              <a:rPr sz="1950" i="0" b="0">
                 <a:solidFill>
                   <a:srgbClr val="D9DADA"/>
                 </a:solidFill>
-                <a:latin typeface="HK Grotesk"/>
-                <a:ea typeface="HK Grotesk"/>
-                <a:cs typeface="HK Grotesk"/>
+                <a:latin typeface="Space Grotesk"/>
+                <a:ea typeface="Space Grotesk"/>
+                <a:cs typeface="Space Grotesk"/>
               </a:rPr>
               <a:t>Congratulations to the new owners of 1200 N Wells, 14C.</a:t>
             </a:r>
@@ -3850,8 +3850,8 @@
         </p:nvSpPr>
         <p:spPr>
           <a:xfrm>
-            <a:off x="-2057400" y="9567862"/>
-            <a:ext cx="14401800" cy="104775"/>
+            <a:off x="-2057400" y="9819382"/>
+            <a:ext cx="14401800" cy="180975"/>
           </a:xfrm>
           <a:prstGeom prst="rect">
             <a:avLst/>
@@ -3864,7 +3864,7 @@
           <a:p>
             <a:pPr algn="ctr"/>
             <a:r>
-              <a:rPr sz="750" i="0" b="0" spc="240">
+              <a:rPr sz="1200" i="0" b="0" spc="384">
                 <a:solidFill>
                   <a:srgbClr val="B8B9BA"/>
                 </a:solidFill>
@@ -3885,8 +3885,8 @@
         </p:nvSpPr>
         <p:spPr>
           <a:xfrm>
-            <a:off x="1238250" y="15978188"/>
-            <a:ext cx="2631519" cy="161925"/>
+            <a:off x="1314450" y="15825788"/>
+            <a:ext cx="3831669" cy="257175"/>
           </a:xfrm>
           <a:prstGeom prst="rect">
             <a:avLst/>
@@ -3899,13 +3899,13 @@
           <a:p>
             <a:pPr algn="l"/>
             <a:r>
-              <a:rPr sz="1125" i="0" b="1" spc="22">
+              <a:rPr sz="1725" i="0" b="1" spc="34">
                 <a:solidFill>
                   <a:srgbClr val="FFFFFF"/>
                 </a:solidFill>
-                <a:latin typeface="HK Grotesk"/>
-                <a:ea typeface="HK Grotesk"/>
-                <a:cs typeface="HK Grotesk"/>
+                <a:latin typeface="Space Grotesk"/>
+                <a:ea typeface="Space Grotesk"/>
+                <a:cs typeface="Space Grotesk"/>
               </a:rPr>
               <a:t>Thinking of selling?</a:t>
             </a:r>
@@ -3920,8 +3920,8 @@
         </p:nvSpPr>
         <p:spPr>
           <a:xfrm>
-            <a:off x="9105900" y="15954375"/>
-            <a:ext cx="609600" cy="209550"/>
+            <a:off x="9001125" y="15821025"/>
+            <a:ext cx="685800" cy="266700"/>
           </a:xfrm>
           <a:prstGeom prst="rect">
             <a:avLst/>
@@ -3934,13 +3934,13 @@
           <a:p>
             <a:pPr algn="l"/>
             <a:r>
-              <a:rPr sz="1350" i="0" b="0">
+              <a:rPr sz="1800" i="0" b="0">
                 <a:solidFill>
                   <a:srgbClr val="2D5BE3"/>
                 </a:solidFill>
-                <a:latin typeface="HK Grotesk"/>
-                <a:ea typeface="HK Grotesk"/>
-                <a:cs typeface="HK Grotesk"/>
+                <a:latin typeface="Space Grotesk"/>
+                <a:ea typeface="Space Grotesk"/>
+                <a:cs typeface="Space Grotesk"/>
               </a:rPr>
               <a:t>↗</a:t>
             </a:r>
@@ -3955,8 +3955,8 @@
         </p:nvSpPr>
         <p:spPr>
           <a:xfrm>
-            <a:off x="2557031" y="17297400"/>
-            <a:ext cx="5172789" cy="123825"/>
+            <a:off x="1468041" y="17249775"/>
+            <a:ext cx="7350919" cy="180975"/>
           </a:xfrm>
           <a:prstGeom prst="rect">
             <a:avLst/>
@@ -3969,7 +3969,7 @@
           <a:p>
             <a:pPr algn="ctr"/>
             <a:r>
-              <a:rPr sz="825" i="0" b="0" spc="264">
+              <a:rPr sz="1200" i="0" b="0" spc="384">
                 <a:solidFill>
                   <a:srgbClr val="B8B9BA"/>
                 </a:solidFill>

--- a/metro/metro-s02-just-sold.pptx
+++ b/metro/metro-s02-just-sold.pptx
@@ -3316,7 +3316,7 @@
         </p:nvSpPr>
         <p:spPr>
           <a:xfrm>
-            <a:off x="4036070" y="5419725"/>
+            <a:off x="3957042" y="5434012"/>
             <a:ext cx="514350" cy="9525"/>
           </a:xfrm>
           <a:prstGeom prst="rect">
@@ -3360,7 +3360,7 @@
         </p:nvSpPr>
         <p:spPr>
           <a:xfrm>
-            <a:off x="5736580" y="5419725"/>
+            <a:off x="5815608" y="5434012"/>
             <a:ext cx="514350" cy="9525"/>
           </a:xfrm>
           <a:prstGeom prst="rect">
@@ -3404,7 +3404,7 @@
         </p:nvSpPr>
         <p:spPr>
           <a:xfrm>
-            <a:off x="762000" y="15525750"/>
+            <a:off x="762000" y="15478125"/>
             <a:ext cx="8763000" cy="9525"/>
           </a:xfrm>
           <a:prstGeom prst="rect">
@@ -3492,8 +3492,8 @@
         </p:nvSpPr>
         <p:spPr>
           <a:xfrm>
-            <a:off x="762000" y="15525750"/>
-            <a:ext cx="9525" cy="857250"/>
+            <a:off x="762000" y="15478125"/>
+            <a:ext cx="9525" cy="904875"/>
           </a:xfrm>
           <a:prstGeom prst="rect">
             <a:avLst/>
@@ -3536,8 +3536,8 @@
         </p:nvSpPr>
         <p:spPr>
           <a:xfrm>
-            <a:off x="9515475" y="15525750"/>
-            <a:ext cx="9525" cy="857250"/>
+            <a:off x="9515475" y="15478125"/>
+            <a:ext cx="9525" cy="904875"/>
           </a:xfrm>
           <a:prstGeom prst="rect">
             <a:avLst/>
@@ -3580,7 +3580,7 @@
         </p:nvSpPr>
         <p:spPr>
           <a:xfrm>
-            <a:off x="1081566" y="15907229"/>
+            <a:off x="1081566" y="15883417"/>
             <a:ext cx="94293" cy="94292"/>
           </a:xfrm>
           <a:prstGeom prst="rect">
@@ -3624,8 +3624,8 @@
         </p:nvSpPr>
         <p:spPr>
           <a:xfrm>
-            <a:off x="873175" y="914400"/>
-            <a:ext cx="756523" cy="152400"/>
+            <a:off x="851148" y="900112"/>
+            <a:ext cx="827008" cy="180975"/>
           </a:xfrm>
           <a:prstGeom prst="rect">
             <a:avLst/>
@@ -3642,7 +3642,7 @@
               </a:lnSpc>
             </a:pPr>
             <a:r>
-              <a:rPr sz="1200" i="0" b="1" spc="24">
+              <a:rPr sz="1425" i="0" b="1" spc="28">
                 <a:solidFill>
                   <a:srgbClr val="FFFFFF"/>
                 </a:solidFill>
@@ -3663,8 +3663,8 @@
         </p:nvSpPr>
         <p:spPr>
           <a:xfrm>
-            <a:off x="6714530" y="900112"/>
-            <a:ext cx="4877752" cy="180975"/>
+            <a:off x="6187529" y="885825"/>
+            <a:ext cx="5720953" cy="209550"/>
           </a:xfrm>
           <a:prstGeom prst="rect">
             <a:avLst/>
@@ -3677,7 +3677,7 @@
           <a:p>
             <a:pPr algn="l"/>
             <a:r>
-              <a:rPr sz="1200" i="0" b="0" spc="384">
+              <a:rPr sz="1425" i="0" b="0" spc="456">
                 <a:solidFill>
                   <a:srgbClr val="A1A2A3"/>
                 </a:solidFill>
@@ -3698,8 +3698,8 @@
         </p:nvSpPr>
         <p:spPr>
           <a:xfrm>
-            <a:off x="4278392" y="5334000"/>
-            <a:ext cx="1730216" cy="180975"/>
+            <a:off x="4151948" y="5334000"/>
+            <a:ext cx="1983105" cy="209550"/>
           </a:xfrm>
           <a:prstGeom prst="rect">
             <a:avLst/>
@@ -3712,7 +3712,7 @@
           <a:p>
             <a:pPr algn="ctr"/>
             <a:r>
-              <a:rPr sz="1200" i="0" b="0" spc="384">
+              <a:rPr sz="1425" i="0" b="0" spc="456">
                 <a:solidFill>
                   <a:srgbClr val="2D5BE3"/>
                 </a:solidFill>
@@ -3733,7 +3733,7 @@
         </p:nvSpPr>
         <p:spPr>
           <a:xfrm>
-            <a:off x="-2057400" y="5800725"/>
+            <a:off x="-2057400" y="5829300"/>
             <a:ext cx="14401800" cy="2453580"/>
           </a:xfrm>
           <a:prstGeom prst="rect">
@@ -3772,7 +3772,7 @@
         </p:nvSpPr>
         <p:spPr>
           <a:xfrm>
-            <a:off x="-2057400" y="8349555"/>
+            <a:off x="-2057400" y="8378130"/>
             <a:ext cx="14401800" cy="349746"/>
           </a:xfrm>
           <a:prstGeom prst="rect">
@@ -3811,8 +3811,8 @@
         </p:nvSpPr>
         <p:spPr>
           <a:xfrm>
-            <a:off x="-838200" y="9080302"/>
-            <a:ext cx="11963400" cy="396180"/>
+            <a:off x="-838200" y="9108877"/>
+            <a:ext cx="11963400" cy="426690"/>
           </a:xfrm>
           <a:prstGeom prst="rect">
             <a:avLst/>
@@ -3829,7 +3829,7 @@
               </a:lnSpc>
             </a:pPr>
             <a:r>
-              <a:rPr sz="1950" i="0" b="0">
+              <a:rPr sz="2100" i="0" b="0">
                 <a:solidFill>
                   <a:srgbClr val="D9DADA"/>
                 </a:solidFill>
@@ -3850,8 +3850,8 @@
         </p:nvSpPr>
         <p:spPr>
           <a:xfrm>
-            <a:off x="-2057400" y="9819382"/>
-            <a:ext cx="14401800" cy="180975"/>
+            <a:off x="-2057400" y="9878467"/>
+            <a:ext cx="14401800" cy="209550"/>
           </a:xfrm>
           <a:prstGeom prst="rect">
             <a:avLst/>
@@ -3864,7 +3864,7 @@
           <a:p>
             <a:pPr algn="ctr"/>
             <a:r>
-              <a:rPr sz="1200" i="0" b="0" spc="384">
+              <a:rPr sz="1425" i="0" b="0" spc="456">
                 <a:solidFill>
                   <a:srgbClr val="B8B9BA"/>
                 </a:solidFill>
@@ -3885,8 +3885,8 @@
         </p:nvSpPr>
         <p:spPr>
           <a:xfrm>
-            <a:off x="1314450" y="15825788"/>
-            <a:ext cx="3831669" cy="257175"/>
+            <a:off x="1314450" y="15782925"/>
+            <a:ext cx="4431744" cy="295275"/>
           </a:xfrm>
           <a:prstGeom prst="rect">
             <a:avLst/>
@@ -3899,7 +3899,7 @@
           <a:p>
             <a:pPr algn="l"/>
             <a:r>
-              <a:rPr sz="1725" i="0" b="1" spc="34">
+              <a:rPr sz="2025" i="0" b="1" spc="40">
                 <a:solidFill>
                   <a:srgbClr val="FFFFFF"/>
                 </a:solidFill>
@@ -3920,8 +3920,8 @@
         </p:nvSpPr>
         <p:spPr>
           <a:xfrm>
-            <a:off x="9001125" y="15821025"/>
-            <a:ext cx="685800" cy="266700"/>
+            <a:off x="8972550" y="15773400"/>
+            <a:ext cx="731520" cy="314325"/>
           </a:xfrm>
           <a:prstGeom prst="rect">
             <a:avLst/>
@@ -3934,7 +3934,7 @@
           <a:p>
             <a:pPr algn="l"/>
             <a:r>
-              <a:rPr sz="1800" i="0" b="0">
+              <a:rPr sz="2100" i="0" b="0">
                 <a:solidFill>
                   <a:srgbClr val="2D5BE3"/>
                 </a:solidFill>
@@ -3955,8 +3955,8 @@
         </p:nvSpPr>
         <p:spPr>
           <a:xfrm>
-            <a:off x="1468041" y="17249775"/>
-            <a:ext cx="7350919" cy="180975"/>
+            <a:off x="814626" y="17221200"/>
+            <a:ext cx="8657749" cy="209550"/>
           </a:xfrm>
           <a:prstGeom prst="rect">
             <a:avLst/>
@@ -3969,7 +3969,7 @@
           <a:p>
             <a:pPr algn="ctr"/>
             <a:r>
-              <a:rPr sz="1200" i="0" b="0" spc="384">
+              <a:rPr sz="1425" i="0" b="0" spc="456">
                 <a:solidFill>
                   <a:srgbClr val="B8B9BA"/>
                 </a:solidFill>
